--- a/pptx/plum-rich/occ-journal-club.pptx
+++ b/pptx/plum-rich/occ-journal-club.pptx
@@ -87,7 +87,7 @@
               <c:strCache>
                 <c:ptCount val="1"/>
                 <c:pt idx="0">
-                  <c:v>정확도</c:v>
+                  <c:v>Accuracy</c:v>
                 </c:pt>
               </c:strCache>
             </c:strRef>
@@ -159,7 +159,7 @@
                   <c:v>cell2location</c:v>
                 </c:pt>
                 <c:pt idx="3">
-                  <c:v>새 방법</c:v>
+                  <c:v>New method</c:v>
                 </c:pt>
               </c:strCache>
             </c:strRef>
@@ -255,7 +255,7 @@
                     </a:solidFill>
                     <a:latin typeface="Pretendard"/>
                   </a:rPr>
-                  <a:t>Pearson r (합성 스팟 2,000개)</a:t>
+                  <a:t>Pearson r (2,000 synthetic spots)</a:t>
                 </a:r>
               </a:p>
             </c:rich>
@@ -3779,7 +3779,7 @@
           <a:lstStyle/>
           <a:p>
             <a:r>
-              <a:t>스팟을 세포 상태로 나누는 새 방법</a:t>
+              <a:t>Reference-free spot deconvolution</a:t>
             </a:r>
           </a:p>
         </p:txBody>
@@ -3800,7 +3800,7 @@
           <a:lstStyle/>
           <a:p>
             <a:r>
-              <a:t>예시 논문 (가상) · 2026</a:t>
+              <a:t>Example paper (fictional) · 2026</a:t>
             </a:r>
           </a:p>
         </p:txBody>
@@ -3826,7 +3826,7 @@
           </a:p>
           <a:p>
             <a:r>
-              <a:t>박사과정 발표자</a:t>
+              <a:t>PhD student</a:t>
             </a:r>
           </a:p>
         </p:txBody>
@@ -3865,7 +3865,7 @@
           <a:lstStyle/>
           <a:p>
             <a:r>
-              <a:t>배경 · 질문</a:t>
+              <a:t>Background · Question</a:t>
             </a:r>
           </a:p>
         </p:txBody>
@@ -3886,7 +3886,7 @@
           <a:lstStyle/>
           <a:p>
             <a:r>
-              <a:t>스팟 하나에 세포 여러 개가 섞인다는 게 출발점이에요</a:t>
+              <a:t>Each spot mixes several cells, and that is the starting point</a:t>
             </a:r>
           </a:p>
         </p:txBody>
@@ -4022,7 +4022,7 @@
                   <a:srgbClr val="262B33"/>
                 </a:solidFill>
               </a:rPr>
-              <a:t>배경</a:t>
+              <a:t>Known</a:t>
             </a:r>
           </a:p>
         </p:txBody>
@@ -4060,7 +4060,7 @@
                   <a:srgbClr val="262B33"/>
                 </a:solidFill>
               </a:rPr>
-              <a:t>Visium 스팟(55μm)에는 세포가 5–10개 섞여 있다</a:t>
+              <a:t>A Visium spot (55 μm) mixes 5–10 cells</a:t>
             </a:r>
           </a:p>
         </p:txBody>
@@ -4231,7 +4231,7 @@
                   <a:srgbClr val="262B33"/>
                 </a:solidFill>
               </a:rPr>
-              <a:t>한계</a:t>
+              <a:t>Gap</a:t>
             </a:r>
           </a:p>
         </p:txBody>
@@ -4269,7 +4269,7 @@
                   <a:srgbClr val="262B33"/>
                 </a:solidFill>
               </a:rPr>
-              <a:t>기존 디컨볼루션은 참조에 없는 세포 상태를 놓친다</a:t>
+              <a:t>Current deconvolution misses cell states that are not in the reference</a:t>
             </a:r>
           </a:p>
         </p:txBody>
@@ -4436,7 +4436,7 @@
                   <a:srgbClr val="FFFFFF"/>
                 </a:solidFill>
               </a:rPr>
-              <a:t>질문</a:t>
+              <a:t>Question</a:t>
             </a:r>
           </a:p>
         </p:txBody>
@@ -4474,7 +4474,7 @@
                   <a:srgbClr val="FFFFFF"/>
                 </a:solidFill>
               </a:rPr>
-              <a:t>참조 없이도 세포 상태를 나눌 수 있을까?</a:t>
+              <a:t>Can we separate cell states without a reference?</a:t>
             </a:r>
           </a:p>
         </p:txBody>
@@ -4535,7 +4535,7 @@
           <a:lstStyle/>
           <a:p>
             <a:r>
-              <a:t>배경 · 질문</a:t>
+              <a:t>Background · Question</a:t>
             </a:r>
           </a:p>
         </p:txBody>
@@ -4556,7 +4556,7 @@
           <a:lstStyle/>
           <a:p>
             <a:r>
-              <a:t>기존 두 방법은 참조가 있어야만 돌아가요</a:t>
+              <a:t>Both existing methods work only with a reference</a:t>
             </a:r>
           </a:p>
         </p:txBody>
@@ -4705,7 +4705,7 @@
                   <a:srgbClr val="262B33"/>
                 </a:solidFill>
               </a:rPr>
-              <a:t>단일세포 필요</a:t>
+              <a:t>Single-cell required</a:t>
             </a:r>
           </a:p>
         </p:txBody>
@@ -4746,7 +4746,7 @@
                 <a:ea typeface="Pretendard Medium"/>
                 <a:cs typeface="Pretendard Medium"/>
               </a:rPr>
-              <a:t>참조 데이터</a:t>
+              <a:t>Reference data</a:t>
             </a:r>
           </a:p>
         </p:txBody>
@@ -4784,7 +4784,7 @@
                   <a:srgbClr val="262B33"/>
                 </a:solidFill>
               </a:rPr>
-              <a:t>단일세포 필요</a:t>
+              <a:t>Single-cell required</a:t>
             </a:r>
           </a:p>
         </p:txBody>
@@ -4857,7 +4857,7 @@
                   <a:srgbClr val="262B33"/>
                 </a:solidFill>
               </a:rPr>
-              <a:t>찾지 못함</a:t>
+              <a:t>Not detected</a:t>
             </a:r>
           </a:p>
         </p:txBody>
@@ -4898,7 +4898,7 @@
                 <a:ea typeface="Pretendard Medium"/>
                 <a:cs typeface="Pretendard Medium"/>
               </a:rPr>
-              <a:t>새 세포 상태</a:t>
+              <a:t>New cell states</a:t>
             </a:r>
           </a:p>
         </p:txBody>
@@ -4936,7 +4936,7 @@
                   <a:srgbClr val="262B33"/>
                 </a:solidFill>
               </a:rPr>
-              <a:t>찾지 못함</a:t>
+              <a:t>Not detected</a:t>
             </a:r>
           </a:p>
         </p:txBody>
@@ -5009,7 +5009,7 @@
                   <a:srgbClr val="262B33"/>
                 </a:solidFill>
               </a:rPr>
-              <a:t>약 2시간</a:t>
+              <a:t>About 2 h</a:t>
             </a:r>
           </a:p>
         </p:txBody>
@@ -5050,7 +5050,7 @@
                 <a:ea typeface="Pretendard Medium"/>
                 <a:cs typeface="Pretendard Medium"/>
               </a:rPr>
-              <a:t>속도 (스팟 4천 개)</a:t>
+              <a:t>Speed (4,000 spots)</a:t>
             </a:r>
           </a:p>
         </p:txBody>
@@ -5088,7 +5088,7 @@
                   <a:srgbClr val="262B33"/>
                 </a:solidFill>
               </a:rPr>
-              <a:t>약 20분</a:t>
+              <a:t>About 20 min</a:t>
             </a:r>
           </a:p>
         </p:txBody>
@@ -5170,7 +5170,7 @@
           <a:lstStyle/>
           <a:p>
             <a:r>
-              <a:t>공간전사체와 단일세포를 같은 환자에서 얻어 비교했어요</a:t>
+              <a:t>Spatial and single-cell data come from the same patients</a:t>
             </a:r>
           </a:p>
         </p:txBody>
@@ -5262,7 +5262,7 @@
                   <a:srgbClr val="262B33"/>
                 </a:solidFill>
               </a:rPr>
-              <a:t>대상</a:t>
+              <a:t>Cohort</a:t>
             </a:r>
           </a:p>
         </p:txBody>
@@ -5319,8 +5319,8 @@
         </p:nvSpPr>
         <p:spPr>
           <a:xfrm>
-            <a:off x="655200" y="3323013"/>
-            <a:ext cx="2115630" cy="585809"/>
+            <a:off x="655200" y="3175014"/>
+            <a:ext cx="2115630" cy="881807"/>
           </a:xfrm>
           <a:prstGeom prst="rect">
             <a:avLst/>
@@ -5344,7 +5344,7 @@
                   <a:srgbClr val="262B33"/>
                 </a:solidFill>
               </a:rPr>
-              <a:t>대장암 환자 8명</a:t>
+              <a:t>8 colorectal cancer patients</a:t>
             </a:r>
           </a:p>
           <a:p>
@@ -5362,7 +5362,7 @@
                   <a:srgbClr val="6B7280"/>
                 </a:solidFill>
               </a:rPr>
-              <a:t>수술 조직 · 같은 블록</a:t>
+              <a:t>Surgical tissue · same block</a:t>
             </a:r>
           </a:p>
         </p:txBody>
@@ -5400,7 +5400,7 @@
                   <a:srgbClr val="6B7280"/>
                 </a:solidFill>
               </a:rPr>
-              <a:t>n = 8 · 절편 16장</a:t>
+              <a:t>n = 8 · 16 sections</a:t>
             </a:r>
           </a:p>
         </p:txBody>
@@ -5528,7 +5528,7 @@
                   <a:srgbClr val="262B33"/>
                 </a:solidFill>
               </a:rPr>
-              <a:t>비교</a:t>
+              <a:t>Comparison</a:t>
             </a:r>
           </a:p>
         </p:txBody>
@@ -5652,7 +5652,7 @@
                   <a:srgbClr val="FFFFFF"/>
                 </a:solidFill>
               </a:rPr>
-              <a:t>Visium 공간전사체</a:t>
+              <a:t>Visium spatial</a:t>
             </a:r>
           </a:p>
           <a:p>
@@ -5670,7 +5670,7 @@
                   <a:srgbClr val="FFFFFF"/>
                 </a:solidFill>
               </a:rPr>
-              <a:t>절편 16장</a:t>
+              <a:t>16 sections</a:t>
             </a:r>
           </a:p>
         </p:txBody>
@@ -5750,7 +5750,7 @@
                   <a:srgbClr val="6B7280"/>
                 </a:solidFill>
               </a:rPr>
-              <a:t>scRNA-seq 참조</a:t>
+              <a:t>scRNA-seq reference</a:t>
             </a:r>
           </a:p>
           <a:p>
@@ -5768,7 +5768,7 @@
                   <a:srgbClr val="6B7280"/>
                 </a:solidFill>
               </a:rPr>
-              <a:t>세포 6만 개</a:t>
+              <a:t>60,000 cells</a:t>
             </a:r>
           </a:p>
         </p:txBody>
@@ -5806,7 +5806,7 @@
                   <a:srgbClr val="6B7280"/>
                 </a:solidFill>
               </a:rPr>
-              <a:t>같은 조직에서 두 방법</a:t>
+              <a:t>Both methods on the same tissue</a:t>
             </a:r>
           </a:p>
         </p:txBody>
@@ -5934,7 +5934,7 @@
                   <a:srgbClr val="262B33"/>
                 </a:solidFill>
               </a:rPr>
-              <a:t>측정</a:t>
+              <a:t>Measure</a:t>
             </a:r>
           </a:p>
         </p:txBody>
@@ -6016,7 +6016,7 @@
                   <a:srgbClr val="262B33"/>
                 </a:solidFill>
               </a:rPr>
-              <a:t>세포 상태 비율</a:t>
+              <a:t>Cell-state proportions</a:t>
             </a:r>
           </a:p>
           <a:p>
@@ -6034,7 +6034,7 @@
                   <a:srgbClr val="6B7280"/>
                 </a:solidFill>
               </a:rPr>
-              <a:t>스팟마다 상태 8개</a:t>
+              <a:t>8 states per spot</a:t>
             </a:r>
           </a:p>
         </p:txBody>
@@ -6072,7 +6072,7 @@
                   <a:srgbClr val="6B7280"/>
                 </a:solidFill>
               </a:rPr>
-              <a:t>스팟 약 3만 개</a:t>
+              <a:t>About 30,000 spots</a:t>
             </a:r>
           </a:p>
         </p:txBody>
@@ -6200,7 +6200,7 @@
                   <a:srgbClr val="262B33"/>
                 </a:solidFill>
               </a:rPr>
-              <a:t>분석</a:t>
+              <a:t>Analysis</a:t>
             </a:r>
           </a:p>
         </p:txBody>
@@ -6282,7 +6282,7 @@
                   <a:srgbClr val="262B33"/>
                 </a:solidFill>
               </a:rPr>
-              <a:t>벤치마크 · 생물학 해석</a:t>
+              <a:t>Benchmark · biology</a:t>
             </a:r>
           </a:p>
           <a:p>
@@ -6300,7 +6300,7 @@
                   <a:srgbClr val="6B7280"/>
                 </a:solidFill>
               </a:rPr>
-              <a:t>합성 스팟 · 실제 조직</a:t>
+              <a:t>Synthetic spots · real tissue</a:t>
             </a:r>
           </a:p>
         </p:txBody>
@@ -6338,7 +6338,7 @@
                   <a:srgbClr val="6B7280"/>
                 </a:solidFill>
               </a:rPr>
-              <a:t>방법 4개와 비교</a:t>
+              <a:t>Compared with 4 methods</a:t>
             </a:r>
           </a:p>
         </p:txBody>
@@ -6399,7 +6399,7 @@
           <a:lstStyle/>
           <a:p>
             <a:r>
-              <a:t>Figure 1 · 방법</a:t>
+              <a:t>Figure 1 · Method</a:t>
             </a:r>
           </a:p>
         </p:txBody>
@@ -6420,7 +6420,7 @@
           <a:lstStyle/>
           <a:p>
             <a:r>
-              <a:t>공간 이웃 정보를 더해 스팟을 세포 상태로 나눠요</a:t>
+              <a:t>Adding spatial neighbors splits spots into cell states</a:t>
             </a:r>
           </a:p>
         </p:txBody>
@@ -6503,7 +6503,7 @@
                 <a:ea typeface="Pretendard Medium"/>
                 <a:cs typeface="Pretendard Medium"/>
               </a:rPr>
-              <a:t>1단계</a:t>
+              <a:t>Step 1</a:t>
             </a:r>
           </a:p>
         </p:txBody>
@@ -6587,7 +6587,7 @@
                   <a:srgbClr val="7A2E6B"/>
                 </a:solidFill>
               </a:rPr>
-              <a:t>스팟 발현</a:t>
+              <a:t>Spot expression</a:t>
             </a:r>
           </a:p>
         </p:txBody>
@@ -6625,7 +6625,7 @@
                   <a:srgbClr val="262B33"/>
                 </a:solidFill>
               </a:rPr>
-              <a:t>Visium count</a:t>
+              <a:t>Visium counts</a:t>
             </a:r>
           </a:p>
           <a:p>
@@ -6640,7 +6640,7 @@
                   <a:srgbClr val="262B33"/>
                 </a:solidFill>
               </a:rPr>
-              <a:t>→ 정규화 발현</a:t>
+              <a:t>→ normalized expression</a:t>
             </a:r>
           </a:p>
         </p:txBody>
@@ -6761,7 +6761,7 @@
                 <a:ea typeface="Pretendard Medium"/>
                 <a:cs typeface="Pretendard Medium"/>
               </a:rPr>
-              <a:t>2단계</a:t>
+              <a:t>Step 2</a:t>
             </a:r>
           </a:p>
         </p:txBody>
@@ -6845,7 +6845,7 @@
                   <a:srgbClr val="7A2E6B"/>
                 </a:solidFill>
               </a:rPr>
-              <a:t>이웃 그래프</a:t>
+              <a:t>Neighbor graph</a:t>
             </a:r>
           </a:p>
         </p:txBody>
@@ -6883,7 +6883,7 @@
                   <a:srgbClr val="262B33"/>
                 </a:solidFill>
               </a:rPr>
-              <a:t>인접 스팟 6개</a:t>
+              <a:t>6 adjacent spots</a:t>
             </a:r>
           </a:p>
           <a:p>
@@ -6898,7 +6898,7 @@
                   <a:srgbClr val="262B33"/>
                 </a:solidFill>
               </a:rPr>
-              <a:t>→ 공간 그래프</a:t>
+              <a:t>→ spatial graph</a:t>
             </a:r>
           </a:p>
         </p:txBody>
@@ -7019,7 +7019,7 @@
                 <a:ea typeface="Pretendard Medium"/>
                 <a:cs typeface="Pretendard Medium"/>
               </a:rPr>
-              <a:t>3단계</a:t>
+              <a:t>Step 3</a:t>
             </a:r>
           </a:p>
         </p:txBody>
@@ -7032,8 +7032,8 @@
         </p:nvSpPr>
         <p:spPr>
           <a:xfrm>
-            <a:off x="6528060" y="2554783"/>
-            <a:ext cx="2004030" cy="396000"/>
+            <a:off x="6469316" y="2554783"/>
+            <a:ext cx="2121519" cy="396000"/>
           </a:xfrm>
           <a:prstGeom prst="roundRect">
             <a:avLst>
@@ -7078,8 +7078,8 @@
         </p:nvSpPr>
         <p:spPr>
           <a:xfrm>
-            <a:off x="6528060" y="2554783"/>
-            <a:ext cx="2004030" cy="396000"/>
+            <a:off x="6469316" y="2554783"/>
+            <a:ext cx="2121519" cy="396000"/>
           </a:xfrm>
           <a:prstGeom prst="rect">
             <a:avLst/>
@@ -7103,7 +7103,7 @@
                   <a:srgbClr val="FFFFFF"/>
                 </a:solidFill>
               </a:rPr>
-              <a:t>상태 분해</a:t>
+              <a:t>State decomposition</a:t>
             </a:r>
           </a:p>
         </p:txBody>
@@ -7141,7 +7141,7 @@
                   <a:srgbClr val="262B33"/>
                 </a:solidFill>
               </a:rPr>
-              <a:t>그래프 정규화 NMF</a:t>
+              <a:t>Graph-regularized NMF</a:t>
             </a:r>
           </a:p>
           <a:p>
@@ -7156,7 +7156,7 @@
                   <a:srgbClr val="262B33"/>
                 </a:solidFill>
               </a:rPr>
-              <a:t>→ 스팟별 상태 비율</a:t>
+              <a:t>→ state proportions per spot</a:t>
             </a:r>
           </a:p>
         </p:txBody>
@@ -7277,7 +7277,7 @@
                 <a:ea typeface="Pretendard Medium"/>
                 <a:cs typeface="Pretendard Medium"/>
               </a:rPr>
-              <a:t>4단계</a:t>
+              <a:t>Step 4</a:t>
             </a:r>
           </a:p>
         </p:txBody>
@@ -7361,7 +7361,7 @@
                   <a:srgbClr val="7A2E6B"/>
                 </a:solidFill>
               </a:rPr>
-              <a:t>주석</a:t>
+              <a:t>Annotation</a:t>
             </a:r>
           </a:p>
         </p:txBody>
@@ -7399,7 +7399,7 @@
                   <a:srgbClr val="262B33"/>
                 </a:solidFill>
               </a:rPr>
-              <a:t>표지 유전자</a:t>
+              <a:t>Marker genes</a:t>
             </a:r>
           </a:p>
           <a:p>
@@ -7414,7 +7414,7 @@
                   <a:srgbClr val="262B33"/>
                 </a:solidFill>
               </a:rPr>
-              <a:t>→ 상태 이름</a:t>
+              <a:t>→ state names</a:t>
             </a:r>
           </a:p>
         </p:txBody>
@@ -7475,7 +7475,7 @@
           <a:lstStyle/>
           <a:p>
             <a:r>
-              <a:t>Figure 3 · 벤치마크</a:t>
+              <a:t>Figure 3 · Benchmark</a:t>
             </a:r>
           </a:p>
         </p:txBody>
@@ -7496,7 +7496,7 @@
           <a:lstStyle/>
           <a:p>
             <a:r>
-              <a:t>합성 데이터에서 새 방법의 정확도가 가장 높아요</a:t>
+              <a:t>The new method is the most accurate on synthetic data</a:t>
             </a:r>
           </a:p>
         </p:txBody>
@@ -7552,7 +7552,7 @@
                   <a:srgbClr val="6B7280"/>
                 </a:solidFill>
               </a:rPr>
-              <a:t>논문 Figure 3B 를 다시 그림 (예시 값).</a:t>
+              <a:t>Redrawn from Figure 3B (example values).</a:t>
             </a:r>
           </a:p>
         </p:txBody>
@@ -7613,7 +7613,7 @@
           <a:lstStyle/>
           <a:p>
             <a:r>
-              <a:t>Figure 4 · 실제 조직</a:t>
+              <a:t>Figure 4 · Real tissue</a:t>
             </a:r>
           </a:p>
         </p:txBody>
@@ -7634,7 +7634,7 @@
           <a:lstStyle/>
           <a:p>
             <a:r>
-              <a:t>새 상태 하나가 종양 경계를 따라 띠처럼 나타나요</a:t>
+              <a:t>A new state runs as a band along the tumor border</a:t>
             </a:r>
           </a:p>
         </p:txBody>
@@ -7719,7 +7719,7 @@
         <p:spPr>
           <a:xfrm>
             <a:off x="5461668" y="3066062"/>
-            <a:ext cx="553779" cy="223200"/>
+            <a:ext cx="655594" cy="223200"/>
           </a:xfrm>
           <a:prstGeom prst="rect">
             <a:avLst/>
@@ -7750,7 +7750,7 @@
                   <a:srgbClr val="7A2E6B"/>
                 </a:solidFill>
               </a:rPr>
-              <a:t>상태 5</a:t>
+              <a:t>State 5</a:t>
             </a:r>
           </a:p>
         </p:txBody>
@@ -7788,7 +7788,7 @@
                   <a:srgbClr val="6B7280"/>
                 </a:solidFill>
               </a:rPr>
-              <a:t>Fig. 4B · 대장암 절편 2, 스팟 1,492개 (예시 그림)</a:t>
+              <a:t>Fig. 4B · colorectal cancer section 2, 1,492 spots (example image)</a:t>
             </a:r>
           </a:p>
         </p:txBody>
@@ -7861,7 +7861,7 @@
                   <a:srgbClr val="6B7280"/>
                 </a:solidFill>
               </a:rPr>
-              <a:t>참조에 없던 상태 5가 </a:t>
+              <a:t>State 5, absent from the reference, appears </a:t>
             </a:r>
             <a:r>
               <a:rPr sz="1400" b="1" spc="-40">
@@ -7869,7 +7869,7 @@
                   <a:srgbClr val="262B33"/>
                 </a:solidFill>
               </a:rPr>
-              <a:t>경계부에만</a:t>
+              <a:t>only at the border</a:t>
             </a:r>
             <a:r>
               <a:rPr sz="1400" b="0" spc="-40">
@@ -7877,7 +7877,7 @@
                   <a:srgbClr val="6B7280"/>
                 </a:solidFill>
               </a:rPr>
-              <a:t> 나타나요. 기존 방법은 이걸 섬유아세포로 뭉뚱그렸어요.</a:t>
+              <a:t>. Existing methods lumped it in with fibroblasts.</a:t>
             </a:r>
           </a:p>
         </p:txBody>
@@ -7938,7 +7938,7 @@
           <a:lstStyle/>
           <a:p>
             <a:r>
-              <a:t>한계 · 열린 질문</a:t>
+              <a:t>Limitations · Open questions</a:t>
             </a:r>
           </a:p>
         </p:txBody>
@@ -7959,7 +7959,7 @@
           <a:lstStyle/>
           <a:p>
             <a:r>
-              <a:t>새 상태가 실제 세포인지는 아직 확인되지 않았어요</a:t>
+              <a:t>We do not yet know whether the new states are real cells</a:t>
             </a:r>
           </a:p>
         </p:txBody>
@@ -8084,7 +8084,7 @@
                   <a:srgbClr val="262B33"/>
                 </a:solidFill>
               </a:rPr>
-              <a:t>검증</a:t>
+              <a:t>Validation</a:t>
             </a:r>
           </a:p>
         </p:txBody>
@@ -8122,7 +8122,7 @@
                   <a:srgbClr val="6B7280"/>
                 </a:solidFill>
               </a:rPr>
-              <a:t>새로 찾은 상태 3개는 면역염색으로 확인하지 않았다</a:t>
+              <a:t>The 3 new states were not checked by immunostaining</a:t>
             </a:r>
           </a:p>
         </p:txBody>
@@ -8247,7 +8247,7 @@
                   <a:srgbClr val="262B33"/>
                 </a:solidFill>
               </a:rPr>
-              <a:t>해상도</a:t>
+              <a:t>Resolution</a:t>
             </a:r>
           </a:p>
         </p:txBody>
@@ -8285,7 +8285,7 @@
                   <a:srgbClr val="6B7280"/>
                 </a:solidFill>
               </a:rPr>
-              <a:t>Visium HD 처럼 작은 스팟에서는 시험하지 않았다</a:t>
+              <a:t>Not tested on small spots such as Visium HD</a:t>
             </a:r>
           </a:p>
         </p:txBody>
@@ -8375,7 +8375,7 @@
                   <a:srgbClr val="262B33"/>
                 </a:solidFill>
               </a:rPr>
-              <a:t>계산 비용</a:t>
+              <a:t>Compute</a:t>
             </a:r>
           </a:p>
         </p:txBody>
@@ -8413,7 +8413,7 @@
                   <a:srgbClr val="6B7280"/>
                 </a:solidFill>
               </a:rPr>
-              <a:t>스팟 2만 개를 넘으면 메모리가 64GB 넘게 든다</a:t>
+              <a:t>Over 20,000 spots needs more than 64 GB of memory</a:t>
             </a:r>
           </a:p>
         </p:txBody>
@@ -8474,7 +8474,7 @@
           <a:lstStyle/>
           <a:p>
             <a:r>
-              <a:t>우리 연구와 연결</a:t>
+              <a:t>Link to our research</a:t>
             </a:r>
           </a:p>
         </p:txBody>
@@ -8495,7 +8495,7 @@
           <a:lstStyle/>
           <a:p>
             <a:r>
-              <a:t>우리 대장암 Visium 데이터에 먼저 써 볼 만해요</a:t>
+              <a:t>Worth trying first on our colorectal Visium data</a:t>
             </a:r>
           </a:p>
         </p:txBody>
@@ -8521,7 +8521,7 @@
           <a:lstStyle/>
           <a:p>
             <a:r>
-              <a:t>가져올 점</a:t>
+              <a:t>What to borrow</a:t>
             </a:r>
             <a:r>
               <a:rPr sz="1300" b="0" spc="-40">
@@ -8532,7 +8532,7 @@
                 <a:ea typeface="Pretendard Medium"/>
                 <a:cs typeface="Pretendard Medium"/>
               </a:rPr>
-              <a:t>   우리 데이터에 바로</a:t>
+              <a:t>   For our data now</a:t>
             </a:r>
           </a:p>
         </p:txBody>
@@ -8571,7 +8571,7 @@
                   <a:srgbClr val="262B33"/>
                 </a:solidFill>
               </a:rPr>
-              <a:t>경계부 스팟을 상태로 나누기</a:t>
+              <a:t>Split border spots into states</a:t>
             </a:r>
           </a:p>
           <a:p>
@@ -8589,7 +8589,7 @@
                   <a:srgbClr val="262B33"/>
                 </a:solidFill>
               </a:rPr>
-              <a:t>참조 없는 섹션 3·4 에 시험</a:t>
+              <a:t>Test on sections 3 · 4, which have no reference</a:t>
             </a:r>
           </a:p>
           <a:p>
@@ -8607,7 +8607,7 @@
                   <a:srgbClr val="262B33"/>
                 </a:solidFill>
               </a:rPr>
-              <a:t>이웃 그래프는 그대로 재사용</a:t>
+              <a:t>Reuse the neighbor graph as is</a:t>
             </a:r>
           </a:p>
         </p:txBody>
@@ -8633,7 +8633,7 @@
           <a:lstStyle/>
           <a:p>
             <a:r>
-              <a:t>토론 질문</a:t>
+              <a:t>Discussion</a:t>
             </a:r>
             <a:r>
               <a:rPr sz="1300" b="0" spc="-40">
@@ -8644,7 +8644,7 @@
                 <a:ea typeface="Pretendard Medium"/>
                 <a:cs typeface="Pretendard Medium"/>
               </a:rPr>
-              <a:t>   같이 이야기할 것</a:t>
+              <a:t>   To talk about together</a:t>
             </a:r>
           </a:p>
         </p:txBody>
@@ -8683,7 +8683,7 @@
                   <a:srgbClr val="262B33"/>
                 </a:solidFill>
               </a:rPr>
-              <a:t>새 상태를 어떻게 검증할까?</a:t>
+              <a:t>How would we validate the new states?</a:t>
             </a:r>
           </a:p>
           <a:p>
@@ -8701,7 +8701,7 @@
                   <a:srgbClr val="262B33"/>
                 </a:solidFill>
               </a:rPr>
-              <a:t>스팟 크기가 작아지면 필요할까?</a:t>
+              <a:t>Is it still needed with smaller spots?</a:t>
             </a:r>
           </a:p>
           <a:p>
@@ -8719,7 +8719,7 @@
                   <a:srgbClr val="262B33"/>
                 </a:solidFill>
               </a:rPr>
-              <a:t>우리 GPU 서버로 돌릴 수 있을까?</a:t>
+              <a:t>Can our GPU server run it?</a:t>
             </a:r>
           </a:p>
         </p:txBody>
